--- a/presentaciones/SIO0010-S5-Certificados-y-canal-seguro.pptx
+++ b/presentaciones/SIO0010-S5-Certificados-y-canal-seguro.pptx
@@ -35719,7 +35719,7 @@
                 </a:solidFill>
                 <a:latin typeface="Arial"/>
               </a:rPr>
-              <a:t>El caso no documenta cómo se conectan los 32 cajeros al centro de datos. </a:t>
+              <a:t>El anexo técnico identifica las llaves de los cajeros como 3DES cargadas a mano en 2019, sin rotación. </a:t>
             </a:r>
             <a:r>
               <a:rPr sz="1150" b="1">
@@ -35728,7 +35728,7 @@
                 </a:solidFill>
                 <a:latin typeface="Arial"/>
               </a:rPr>
-              <a:t>Si lo hacen con una llave compartida por todos</a:t>
+              <a:t>Si además se conectan con una llave compartida por todos</a:t>
             </a:r>
             <a:r>
               <a:rPr sz="1150" b="0">
